--- a/system-design-101/vi/lessons/sd-12-005/slides/sd-12-005.pptx
+++ b/system-design-101/vi/lessons/sd-12-005/slides/sd-12-005.pptx
@@ -3141,7 +3141,7 @@
               <a:t> còn</a:t>
             </a:r>
             <a:r>
-              <a:rPr lang="en-US" sz="3000" b="1" dirty="0" spc="-18" kern="0">
+              <a:rPr lang="en-US" sz="3000" b="1" dirty="0" spc="-6" kern="0">
                 <a:solidFill>
                   <a:srgbClr val="6B6A66"/>
                 </a:solidFill>
@@ -3149,10 +3149,10 @@
                 <a:ea typeface="Be Vietnam Pro" pitchFamily="34" charset="-122"/>
                 <a:cs typeface="Be Vietnam Pro" pitchFamily="34" charset="-120"/>
               </a:rPr>
-              <a:t> vài</a:t>
-            </a:r>
-            <a:r>
-              <a:rPr lang="en-US" sz="3000" b="1" dirty="0" spc="-10" kern="0">
+              <a:t> tối</a:t>
+            </a:r>
+            <a:r>
+              <a:rPr lang="en-US" sz="3000" b="1" dirty="0" spc="10" kern="0">
                 <a:solidFill>
                   <a:srgbClr val="6B6A66"/>
                 </a:solidFill>
@@ -3160,7 +3160,18 @@
                 <a:ea typeface="Be Vietnam Pro" pitchFamily="34" charset="-122"/>
                 <a:cs typeface="Be Vietnam Pro" pitchFamily="34" charset="-120"/>
               </a:rPr>
-              <a:t> trăm</a:t>
+              <a:t> đa</a:t>
+            </a:r>
+            <a:r>
+              <a:rPr lang="en-US" sz="3000" b="1" dirty="0" spc="2" kern="0">
+                <a:solidFill>
+                  <a:srgbClr val="6B6A66"/>
+                </a:solidFill>
+                <a:latin typeface="Be Vietnam Pro" pitchFamily="34" charset="0"/>
+                <a:ea typeface="Be Vietnam Pro" pitchFamily="34" charset="-122"/>
+                <a:cs typeface="Be Vietnam Pro" pitchFamily="34" charset="-120"/>
+              </a:rPr>
+              <a:t> 100</a:t>
             </a:r>
             <a:r>
               <a:rPr lang="en-US" sz="3000" b="1" dirty="0" spc="13" kern="0">
